--- a/curriculum/M01/W10/L01/slides.pptx
+++ b/curriculum/M01/W10/L01/slides.pptx
@@ -8321,11 +8321,40 @@
                 <a:ea typeface="Malgun Gothic"/>
                 <a:cs typeface="Malgun Gothic"/>
               </a:rPr>
-              <a:t> 수정 시 정자가 들여온 미토콘드리아는 선택적으로 분해되므로, 자손의 mtDNA는 난자에서만 온다. 따라서 mtDNA 질환은 어머니로부터 모든 자녀에게 전달될 수 있고 아버지로부터는 전달되지 않는다. 2. </a:t>
-            </a:r>
+              <a:t> 수정 시 정자가 들여온 미토콘드리아는 선택적으로 분해되므로, 자손의 mtDNA는 난자에서만 온다. 따라서 mtDNA 질환은 어머니로부터 모든 자녀에게 전달될 수 있고 아버지로부터는 전달되지 않는다.</a:t>
+            </a:r>
+          </a:p>
+          <a:p>
+            <a:pPr>
+              <a:spcAft>
+                <a:spcPts val="900"/>
+              </a:spcAft>
+            </a:pPr>
             <a:r>
               <a:rPr sz="1400" b="1" i="0">
                 <a:solidFill>
+                  <a:srgbClr val="F2B705"/>
+                </a:solidFill>
+                <a:latin typeface="Malgun Gothic"/>
+                <a:ea typeface="Malgun Gothic"/>
+                <a:cs typeface="Malgun Gothic"/>
+              </a:rPr>
+              <a:t>•  </a:t>
+            </a:r>
+            <a:r>
+              <a:rPr sz="1400" b="0" i="0">
+                <a:solidFill>
+                  <a:srgbClr val="11202B"/>
+                </a:solidFill>
+                <a:latin typeface="Malgun Gothic"/>
+                <a:ea typeface="Malgun Gothic"/>
+                <a:cs typeface="Malgun Gothic"/>
+              </a:rPr>
+              <a:t>2. </a:t>
+            </a:r>
+            <a:r>
+              <a:rPr sz="1400" b="1" i="0">
+                <a:solidFill>
                   <a:srgbClr val="11202B"/>
                 </a:solidFill>
                 <a:latin typeface="Malgun Gothic"/>
@@ -8343,11 +8372,40 @@
                 <a:ea typeface="Malgun Gothic"/>
                 <a:cs typeface="Malgun Gothic"/>
               </a:rPr>
-              <a:t> 세포 하나에 mtDNA가 수천 copy 있고, 미토콘드리아 하나에도 여러 copy가 있다. 3. </a:t>
-            </a:r>
+              <a:t> 세포 하나에 mtDNA가 수천 copy 있고, 미토콘드리아 하나에도 여러 copy가 있다.</a:t>
+            </a:r>
+          </a:p>
+          <a:p>
+            <a:pPr>
+              <a:spcAft>
+                <a:spcPts val="900"/>
+              </a:spcAft>
+            </a:pPr>
             <a:r>
               <a:rPr sz="1400" b="1" i="0">
                 <a:solidFill>
+                  <a:srgbClr val="F2B705"/>
+                </a:solidFill>
+                <a:latin typeface="Malgun Gothic"/>
+                <a:ea typeface="Malgun Gothic"/>
+                <a:cs typeface="Malgun Gothic"/>
+              </a:rPr>
+              <a:t>•  </a:t>
+            </a:r>
+            <a:r>
+              <a:rPr sz="1400" b="0" i="0">
+                <a:solidFill>
+                  <a:srgbClr val="11202B"/>
+                </a:solidFill>
+                <a:latin typeface="Malgun Gothic"/>
+                <a:ea typeface="Malgun Gothic"/>
+                <a:cs typeface="Malgun Gothic"/>
+              </a:rPr>
+              <a:t>3. </a:t>
+            </a:r>
+            <a:r>
+              <a:rPr sz="1400" b="1" i="0">
+                <a:solidFill>
                   <a:srgbClr val="11202B"/>
                 </a:solidFill>
                 <a:latin typeface="Malgun Gothic"/>
@@ -8365,7 +8423,36 @@
                 <a:ea typeface="Malgun Gothic"/>
                 <a:cs typeface="Malgun Gothic"/>
               </a:rPr>
-              <a:t> 야생형과 변이형 mtDNA가 한 세포 안에 섞여 존재할 수 있다. 핵 유전자는 대립유전자가 둘뿐이므로 이런 상태가 없다. 4. </a:t>
+              <a:t> 야생형과 변이형 mtDNA가 한 세포 안에 섞여 존재할 수 있다. 핵 유전자는 대립유전자가 둘뿐이므로 이런 상태가 없다.</a:t>
+            </a:r>
+          </a:p>
+          <a:p>
+            <a:pPr>
+              <a:spcAft>
+                <a:spcPts val="900"/>
+              </a:spcAft>
+            </a:pPr>
+            <a:r>
+              <a:rPr sz="1400" b="1" i="0">
+                <a:solidFill>
+                  <a:srgbClr val="F2B705"/>
+                </a:solidFill>
+                <a:latin typeface="Malgun Gothic"/>
+                <a:ea typeface="Malgun Gothic"/>
+                <a:cs typeface="Malgun Gothic"/>
+              </a:rPr>
+              <a:t>•  </a:t>
+            </a:r>
+            <a:r>
+              <a:rPr sz="1400" b="0" i="0">
+                <a:solidFill>
+                  <a:srgbClr val="11202B"/>
+                </a:solidFill>
+                <a:latin typeface="Malgun Gothic"/>
+                <a:ea typeface="Malgun Gothic"/>
+                <a:cs typeface="Malgun Gothic"/>
+              </a:rPr>
+              <a:t>4. </a:t>
             </a:r>
             <a:r>
               <a:rPr sz="1400" b="1" i="0">
@@ -10301,11 +10388,40 @@
                 <a:ea typeface="Malgun Gothic"/>
                 <a:cs typeface="Malgun Gothic"/>
               </a:rPr>
-              <a:t>1. 세포질의 Hsp70 계열 chaperone이 완성된 사슬을 접히지 않은 상태로 붙들어 둔다. 접힌 단백질은 통로를 통과할 수 없다. 2. Presequence가 바깥막의 </a:t>
-            </a:r>
+              <a:t>1. 세포질의 Hsp70 계열 chaperone이 완성된 사슬을 접히지 않은 상태로 붙들어 둔다. 접힌 단백질은 통로를 통과할 수 없다.</a:t>
+            </a:r>
+          </a:p>
+          <a:p>
+            <a:pPr>
+              <a:spcAft>
+                <a:spcPts val="900"/>
+              </a:spcAft>
+            </a:pPr>
             <a:r>
               <a:rPr sz="1400" b="1" i="0">
                 <a:solidFill>
+                  <a:srgbClr val="F2B705"/>
+                </a:solidFill>
+                <a:latin typeface="Malgun Gothic"/>
+                <a:ea typeface="Malgun Gothic"/>
+                <a:cs typeface="Malgun Gothic"/>
+              </a:rPr>
+              <a:t>•  </a:t>
+            </a:r>
+            <a:r>
+              <a:rPr sz="1400" b="0" i="0">
+                <a:solidFill>
+                  <a:srgbClr val="11202B"/>
+                </a:solidFill>
+                <a:latin typeface="Malgun Gothic"/>
+                <a:ea typeface="Malgun Gothic"/>
+                <a:cs typeface="Malgun Gothic"/>
+              </a:rPr>
+              <a:t>2. Presequence가 바깥막의 </a:t>
+            </a:r>
+            <a:r>
+              <a:rPr sz="1400" b="1" i="0">
+                <a:solidFill>
                   <a:srgbClr val="11202B"/>
                 </a:solidFill>
                 <a:latin typeface="Malgun Gothic"/>
@@ -10345,11 +10461,40 @@
                 <a:ea typeface="Malgun Gothic"/>
                 <a:cs typeface="Malgun Gothic"/>
               </a:rPr>
-              <a:t>이 만드는 통로를 지난다. 3. 안쪽막의 </a:t>
-            </a:r>
+              <a:t>이 만드는 통로를 지난다.</a:t>
+            </a:r>
+          </a:p>
+          <a:p>
+            <a:pPr>
+              <a:spcAft>
+                <a:spcPts val="900"/>
+              </a:spcAft>
+            </a:pPr>
             <a:r>
               <a:rPr sz="1400" b="1" i="0">
                 <a:solidFill>
+                  <a:srgbClr val="F2B705"/>
+                </a:solidFill>
+                <a:latin typeface="Malgun Gothic"/>
+                <a:ea typeface="Malgun Gothic"/>
+                <a:cs typeface="Malgun Gothic"/>
+              </a:rPr>
+              <a:t>•  </a:t>
+            </a:r>
+            <a:r>
+              <a:rPr sz="1400" b="0" i="0">
+                <a:solidFill>
+                  <a:srgbClr val="11202B"/>
+                </a:solidFill>
+                <a:latin typeface="Malgun Gothic"/>
+                <a:ea typeface="Malgun Gothic"/>
+                <a:cs typeface="Malgun Gothic"/>
+              </a:rPr>
+              <a:t>3. 안쪽막의 </a:t>
+            </a:r>
+            <a:r>
+              <a:rPr sz="1400" b="1" i="0">
+                <a:solidFill>
                   <a:srgbClr val="11202B"/>
                 </a:solidFill>
                 <a:latin typeface="Malgun Gothic"/>
@@ -10389,11 +10534,40 @@
                 <a:ea typeface="Malgun Gothic"/>
                 <a:cs typeface="Malgun Gothic"/>
               </a:rPr>
-              <a:t> 양전하를 띤 presequence가 음전하인 matrix 쪽으로 끌리기 때문이다. 4. Matrix 쪽에서 </a:t>
-            </a:r>
+              <a:t> 양전하를 띤 presequence가 음전하인 matrix 쪽으로 끌리기 때문이다.</a:t>
+            </a:r>
+          </a:p>
+          <a:p>
+            <a:pPr>
+              <a:spcAft>
+                <a:spcPts val="900"/>
+              </a:spcAft>
+            </a:pPr>
             <a:r>
               <a:rPr sz="1400" b="1" i="0">
                 <a:solidFill>
+                  <a:srgbClr val="F2B705"/>
+                </a:solidFill>
+                <a:latin typeface="Malgun Gothic"/>
+                <a:ea typeface="Malgun Gothic"/>
+                <a:cs typeface="Malgun Gothic"/>
+              </a:rPr>
+              <a:t>•  </a:t>
+            </a:r>
+            <a:r>
+              <a:rPr sz="1400" b="0" i="0">
+                <a:solidFill>
+                  <a:srgbClr val="11202B"/>
+                </a:solidFill>
+                <a:latin typeface="Malgun Gothic"/>
+                <a:ea typeface="Malgun Gothic"/>
+                <a:cs typeface="Malgun Gothic"/>
+              </a:rPr>
+              <a:t>4. Matrix 쪽에서 </a:t>
+            </a:r>
+            <a:r>
+              <a:rPr sz="1400" b="1" i="0">
+                <a:solidFill>
                   <a:srgbClr val="11202B"/>
                 </a:solidFill>
                 <a:latin typeface="Malgun Gothic"/>
@@ -10411,7 +10585,36 @@
                 <a:ea typeface="Malgun Gothic"/>
                 <a:cs typeface="Malgun Gothic"/>
               </a:rPr>
-              <a:t>이 사슬을 ATP 가수분해에 맞춰 반복적으로 잡아당겨 통과를 완결한다. 5. </a:t>
+              <a:t>이 사슬을 ATP 가수분해에 맞춰 반복적으로 잡아당겨 통과를 완결한다.</a:t>
+            </a:r>
+          </a:p>
+          <a:p>
+            <a:pPr>
+              <a:spcAft>
+                <a:spcPts val="900"/>
+              </a:spcAft>
+            </a:pPr>
+            <a:r>
+              <a:rPr sz="1400" b="1" i="0">
+                <a:solidFill>
+                  <a:srgbClr val="F2B705"/>
+                </a:solidFill>
+                <a:latin typeface="Malgun Gothic"/>
+                <a:ea typeface="Malgun Gothic"/>
+                <a:cs typeface="Malgun Gothic"/>
+              </a:rPr>
+              <a:t>•  </a:t>
+            </a:r>
+            <a:r>
+              <a:rPr sz="1400" b="0" i="0">
+                <a:solidFill>
+                  <a:srgbClr val="11202B"/>
+                </a:solidFill>
+                <a:latin typeface="Malgun Gothic"/>
+                <a:ea typeface="Malgun Gothic"/>
+                <a:cs typeface="Malgun Gothic"/>
+              </a:rPr>
+              <a:t>5. </a:t>
             </a:r>
             <a:r>
               <a:rPr sz="1400" b="1" i="0">

--- a/curriculum/M01/W10/L01/slides.pptx
+++ b/curriculum/M01/W10/L01/slides.pptx
@@ -15180,7 +15180,7 @@
                 <a:ea typeface="Malgun Gothic"/>
                 <a:cs typeface="Malgun Gothic"/>
               </a:rPr>
-              <a:t>M01-W09-L03 산화적 이화와 oxidative phosphorylation — 호흡 복합체의 배열과 ATP synthase</a:t>
+              <a:t>M01-W09-L03 Glycolysis·oxidative phosphorylation과 광합성 개요 — 호흡 복합체의 배열과 ATP synthase</a:t>
             </a:r>
           </a:p>
           <a:p>
